--- a/splunk-techtouch-demo/slides/Splunk障害対応・ログ分析デモ_事前説明_短縮版.pptx
+++ b/splunk-techtouch-demo/slides/Splunk障害対応・ログ分析デモ_事前説明_短縮版.pptx
@@ -4888,7 +4888,7 @@
                   <a:schemeClr val="tx1"/>
                 </a:solidFill>
               </a:rPr>
-              <a:t>紫のパネル</a:t>
+              <a:t>紫の札の吹き出し</a:t>
             </a:r>
             <a:endParaRPr lang="en-US" sz="1400" dirty="0"/>
           </a:p>
